--- a/DBTUNING/ch03_실행계획기초/ch03_교안.pptx
+++ b/DBTUNING/ch03_실행계획기초/ch03_교안.pptx
@@ -555,7 +555,7 @@
           <a:lstStyle/>
           <a:p>
             <a:r>
-              <a:t>제3장은 이후 열한 개 챕터를 떠받치는 기초 공사다. 앞으로 어떤 기법을 배우든 개선 여부를 실행계획으로 증명해야 하는데, 계획을 읽지 못하면 그 증명 자체가 성립하지 않는다. 이 장에서는 인덱스를 하나도 만들지 않고 기존 PK 인덱스만으로 여섯 가지 오퍼레이션 패턴을 관찰한다. 실행계획 판독은 문법 학습과 달라서 규칙 몇 줄을 듣는 것만으로는 몸에 붙지 않으므로, 강의 내내 화면의 계획을 손가락으로 짚어 가며 소리 내어 읽히는 진행을 권한다. 첫 화면에서 이 장이 개선의 장이 아니라 판독의 장임을 분명히 선언하고 시작한다. 수업 첫머리에 실습 DB 접속과 DBMS_XPLAN 권한을 미리 점검해 두면 진행이 끊기지 않는다.</a:t>
+              <a:t>제ch03은 이후 열한 개 챕터를 떠받치는 기초 공사다. 앞으로 어떤 기법을 배우든 개선 여부를 실행계획으로 증명해야 하는데, 계획을 읽지 못하면 그 증명 자체가 성립하지 않는다. 이 장에서는 인덱스를 하나도 만들지 않고 기존 PK 인덱스만으로 여섯 가지 오퍼레이션 패턴을 관찰한다. 실행계획 판독은 문법 학습과 달라서 규칙 몇 줄을 듣는 것만으로는 몸에 붙지 않으므로, 강의 내내 화면의 계획을 손가락으로 짚어 가며 소리 내어 읽히는 진행을 권한다. 첫 화면에서 이 장이 개선의 장이 아니라 판독의 장임을 분명히 선언하고 시작한다. 수업 첫머리에 실습 DB 접속과 DBMS_XPLAN 권한을 미리 점검해 두면 진행이 끊기지 않는다.</a:t>
             </a:r>
           </a:p>
         </p:txBody>
@@ -765,7 +765,7 @@
           <a:lstStyle/>
           <a:p>
             <a:r>
-              <a:t>세 번째 절은 실행계획을 만든 주체를 소개하는 구간이다. 계획을 읽기만 하고 누가 왜 그렇게 만들었는지 모르면 이상한 계획을 만났을 때 손을 쓸 수 없다. 여기서 다루는 통계정보의 세 가지 어긋남은 3.6절 실측 사례의 원인 설명이자 Chapter 13 전체의 예고편 역할을 한다. 다만 이 절에서 통계를 깊이 파고들 필요는 없다. 옵티마이저가 원본이 아니라 요약본을 보고 판단한다는 한 문장만 확실히 남기면 목적을 다한 것이다. 통계 항목을 나열만 하고 각각의 상세는 해당 챕터로 미루는 것이 시간 배분에 유리하다.</a:t>
+              <a:t>세 번째 절은 실행계획을 만든 주체를 소개하는 구간이다. 계획을 읽기만 하고 누가 왜 그렇게 만들었는지 모르면 이상한 계획을 만났을 때 손을 쓸 수 없다. 여기서 다루는 통계정보의 세 가지 어긋남은 3.6절 실측 사례의 원인 설명이자 ch08 전체의 예고편 역할을 한다. 다만 이 절에서 통계를 깊이 파고들 필요는 없다. 옵티마이저가 원본이 아니라 요약본을 보고 판단한다는 한 문장만 확실히 남기면 목적을 다한 것이다. 통계 항목을 나열만 하고 각각의 상세는 해당 챕터로 미루는 것이 시간 배분에 유리하다.</a:t>
             </a:r>
           </a:p>
         </p:txBody>
@@ -905,7 +905,7 @@
           <a:lstStyle/>
           <a:p>
             <a:r>
-              <a:t>네 가지 통계 항목을 지금 깊이 설명할 필요는 없다. 각각은 뒤 챕터에서 제 자리를 갖는다. 고유값 개수는 선택도를 다루는 Chapter 4에서, 클러스터링 팩터는 인덱스 설계를 다루는 Chapter 5에서, 히스토그램은 Chapter 13에서 본격적으로 나온다. 지금은 옵티마이저가 데이터 원본이 아니라 요약본을 보고 판단한다는 사실만 확실히 남기면 충분하다. 요약본이라는 말에서 원본과 다를 수 있다는 성질이 자연스럽게 따라 나온다는 점을 강조한다. 네 항목을 외우게 하기보다 어느 챕터에서 다시 만나는지를 알려 주는 편이 기억에 남는다.</a:t>
+              <a:t>네 가지 통계 항목을 지금 깊이 설명할 필요는 없다. 각각은 뒤 챕터에서 제 자리를 갖는다. 고유값 개수는 선택도를 다루는 ch05에서, 클러스터링 팩터는 인덱스 설계를 다루는 ch06에서, 히스토그램은 ch08에서 본격적으로 나온다. 지금은 옵티마이저가 데이터 원본이 아니라 요약본을 보고 판단한다는 사실만 확실히 남기면 충분하다. 요약본이라는 말에서 원본과 다를 수 있다는 성질이 자연스럽게 따라 나온다는 점을 강조한다. 네 항목을 외우게 하기보다 어느 챕터에서 다시 만나는지를 알려 주는 편이 기억에 남는다.</a:t>
             </a:r>
           </a:p>
         </p:txBody>
@@ -2305,7 +2305,7 @@
           <a:lstStyle/>
           <a:p>
             <a:r>
-              <a:t>이 절은 판독이 왜 필요한지를 수치로 증명하는 구간이다. 앞에서 본 예상 계획만으로는 아무 문제도 보이지 않았지만, 실제로 실행해 보면 예상과 실제가 크게 어긋나 있다. 같은 SQL을 두 도구로 각각 확인해야 하는 이유가 여기서 분명해진다. 원인을 설명하는 대목이 다소 추상적이므로 확률의 곱셈이라는 비유를 준비해 두면 좋고, 대응 방법은 Chapter 13의 몫이라는 경계도 미리 그어 둔다. 수치가 등장하는 절이므로 화면의 값을 학습자가 직접 읽게 하는 진행이 몰입에 도움이 된다.</a:t>
+              <a:t>이 절은 판독이 왜 필요한지를 수치로 증명하는 구간이다. 앞에서 본 예상 계획만으로는 아무 문제도 보이지 않았지만, 실제로 실행해 보면 예상과 실제가 크게 어긋나 있다. 같은 SQL을 두 도구로 각각 확인해야 하는 이유가 여기서 분명해진다. 원인을 설명하는 대목이 다소 추상적이므로 확률의 곱셈이라는 비유를 준비해 두면 좋고, 대응 방법은 ch08의 몫이라는 경계도 미리 그어 둔다. 수치가 등장하는 절이므로 화면의 값을 학습자가 직접 읽게 하는 진행이 몰입에 도움이 된다.</a:t>
             </a:r>
           </a:p>
         </p:txBody>
@@ -2585,7 +2585,7 @@
           <a:lstStyle/>
           <a:p>
             <a:r>
-              <a:t>이 대목에서 학습자가 자주 던지는 질문이 옵티마이저가 그 정도는 알아서 해 줘야 하는 것 아니냐는 것이다. 모든 컬럼 조합의 상관관계를 미리 계산해 두려면 조합 폭발이 일어나므로 현실적으로 불가능하다는 점을 설명하면 납득한다. 그래서 상관관계가 실제로 문제되는 조합만 골라 사람이 확장 통계를 만들어 주는 방식을 쓰며, 그 방법은 Chapter 13에서 다룬다. 오차의 방향이 항상 과대 추정인 것은 아니라는 점도 함께 짚어 준다. 기본 동작을 이해하면 옵티마이저를 탓하는 대신 무엇을 알려 줘야 하는지를 묻게 된다.</a:t>
+              <a:t>이 대목에서 학습자가 자주 던지는 질문이 옵티마이저가 그 정도는 알아서 해 줘야 하는 것 아니냐는 것이다. 모든 컬럼 조합의 상관관계를 미리 계산해 두려면 조합 폭발이 일어나므로 현실적으로 불가능하다는 점을 설명하면 납득한다. 그래서 상관관계가 실제로 문제되는 조합만 골라 사람이 확장 통계를 만들어 주는 방식을 쓰며, 그 방법은 ch08에서 다룬다. 오차의 방향이 항상 과대 추정인 것은 아니라는 점도 함께 짚어 준다. 기본 동작을 이해하면 옵티마이저를 탓하는 대신 무엇을 알려 줘야 하는지를 묻게 된다.</a:t>
             </a:r>
           </a:p>
         </p:txBody>
@@ -2935,7 +2935,7 @@
           <a:lstStyle/>
           <a:p>
             <a:r>
-              <a:t>여기서 인덱스를 하나 만들어 보여 주고 싶은 유혹이 생기지만 참는 편이 낫다. 근거 없이 만든 인덱스가 우연히 잘 들으면 학습자는 인덱스를 만들면 빨라진다는 잘못된 일반화를 가져가게 된다. Chapter 4에서 선택도를 배우고 Chapter 5에서 컬럼 순서를 배운 뒤에 이 사례로 돌아오면 같은 조치를 근거를 갖고 설명할 수 있다고 예고한다. 지금 답을 주지 않는 것이 오히려 나중을 위한 설계라는 점을 솔직하게 말해 주면 학습자도 수긍한다. 답을 미루는 이유를 설명해 두면 학습자가 남은 챕터를 기다리는 마음으로 듣게 된다.</a:t>
+              <a:t>여기서 인덱스를 하나 만들어 보여 주고 싶은 유혹이 생기지만 참는 편이 낫다. 근거 없이 만든 인덱스가 우연히 잘 들으면 학습자는 인덱스를 만들면 빨라진다는 잘못된 일반화를 가져가게 된다. ch05에서 선택도를 배우고 ch06에서 컬럼 순서를 배운 뒤에 이 사례로 돌아오면 같은 조치를 근거를 갖고 설명할 수 있다고 예고한다. 지금 답을 주지 않는 것이 오히려 나중을 위한 설계라는 점을 솔직하게 말해 주면 학습자도 수긍한다. 답을 미루는 이유를 설명해 두면 학습자가 남은 챕터를 기다리는 마음으로 듣게 된다.</a:t>
             </a:r>
           </a:p>
         </p:txBody>
@@ -3145,7 +3145,7 @@
           <a:lstStyle/>
           <a:p>
             <a:r>
-              <a:t>Full Scan이 무조건 나쁘다는 오해를 여기서 한 번 눌러 준다. 조건을 만족하는 행이 전체의 상당 비율이라면 인덱스를 타는 것보다 전부 읽는 편이 오히려 빠르다. 판단 기준이 되는 선택도 개념은 Chapter 4의 주제이므로 지금은 비율을 확인해야 한다는 점만 남긴다. 다만 이 사례처럼 결과가 사백 건대인데 전부 읽었다면 개선 여지가 크다. 나쁜 계획이 아니라 확인이 필요한 계획이라는 표현으로 정리해 주는 것이 정확하다. 판단을 유보할 줄 아는 태도가 이 과정 전체에서 요구하는 자세라는 점을 덧붙인다.</a:t>
+              <a:t>Full Scan이 무조건 나쁘다는 오해를 여기서 한 번 눌러 준다. 조건을 만족하는 행이 전체의 상당 비율이라면 인덱스를 타는 것보다 전부 읽는 편이 오히려 빠르다. 판단 기준이 되는 선택도 개념은 ch05의 주제이므로 지금은 비율을 확인해야 한다는 점만 남긴다. 다만 이 사례처럼 결과가 사백 건대인데 전부 읽었다면 개선 여지가 크다. 나쁜 계획이 아니라 확인이 필요한 계획이라는 표현으로 정리해 주는 것이 정확하다. 판단을 유보할 줄 아는 태도가 이 과정 전체에서 요구하는 자세라는 점을 덧붙인다.</a:t>
             </a:r>
           </a:p>
         </p:txBody>
@@ -3845,7 +3845,7 @@
           <a:lstStyle/>
           <a:p>
             <a:r>
-              <a:t>실행 순서를 학습자가 직접 적어 보게 한 뒤 답을 맞추는 방식이 좋다. Id 번호대로 읽으면 조인이 먼저 나오고 그 재료가 나중에 나오는 이상한 순서가 되므로, 들여쓰기 규칙의 필요성이 저절로 드러난다. 해시 조인이 작은 쪽을 빌드 입력으로 고르는 이유는 메모리에 올릴 양을 줄이기 위해서이며, 자세한 원리는 Chapter 7에서 다룬다고 안내한다. 작은 테이블은 인덱스로 큰 테이블은 전체 훑기로 처리된 대비도 함께 짚어 준다. 조인 방식의 상세는 다음 기회로 미루되 빌드와 탐침이라는 두 낱말만은 남겨 둔다.</a:t>
+              <a:t>실행 순서를 학습자가 직접 적어 보게 한 뒤 답을 맞추는 방식이 좋다. Id 번호대로 읽으면 조인이 먼저 나오고 그 재료가 나중에 나오는 이상한 순서가 되므로, 들여쓰기 규칙의 필요성이 저절로 드러난다. 해시 조인이 작은 쪽을 빌드 입력으로 고르는 이유는 메모리에 올릴 양을 줄이기 위해서이며, 자세한 원리는 ch09에서 다룬다고 안내한다. 작은 테이블은 인덱스로 큰 테이블은 전체 훑기로 처리된 대비도 함께 짚어 준다. 조인 방식의 상세는 다음 기회로 미루되 빌드와 탐침이라는 두 낱말만은 남겨 둔다.</a:t>
             </a:r>
           </a:p>
         </p:txBody>
@@ -7352,7 +7352,7 @@
                 </a:solidFill>
                 <a:latin typeface="Malgun Gothic"/>
               </a:rPr>
-              <a:t>Oracle SQL 튜닝 과정  ·  제3장</a:t>
+              <a:t>Oracle SQL 튜닝 과정  ·  제ch03</a:t>
             </a:r>
           </a:p>
         </p:txBody>
@@ -8904,7 +8904,7 @@
                 </a:solidFill>
                 <a:latin typeface="Malgun Gothic"/>
               </a:rPr>
-              <a:t>•  상세 대응은 Chapter 13(Optimizer와 통계정보)에서 다룬다</a:t>
+              <a:t>•  상세 대응은 ch08(Optimizer와 통계정보)에서 다룬다</a:t>
             </a:r>
           </a:p>
           <a:p>
@@ -14667,7 +14667,7 @@
                 </a:solidFill>
                 <a:latin typeface="Malgun Gothic"/>
               </a:rPr>
-              <a:t>•  상세 대응은 Chapter 13(Optimizer와 통계정보)에서 다룬다</a:t>
+              <a:t>•  상세 대응은 ch08(Optimizer와 통계정보)에서 다룬다</a:t>
             </a:r>
           </a:p>
         </p:txBody>
@@ -15359,7 +15359,7 @@
                 </a:solidFill>
                 <a:latin typeface="Malgun Gothic"/>
               </a:rPr>
-              <a:t>•  인덱스를 만들면 해결되는지, 어떤 인덱스가 적합한지는 Chapter 5의 범위</a:t>
+              <a:t>•  인덱스를 만들면 해결되는지, 어떤 인덱스가 적합한지는 ch06의 범위</a:t>
             </a:r>
           </a:p>
           <a:p>
@@ -18937,7 +18937,7 @@
                 </a:solidFill>
                 <a:latin typeface="Malgun Gothic"/>
               </a:rPr>
-              <a:t>•  E-Rows와 A-Rows 차이가 크면 카디널리티 추정 오류를 의심한다 (Chapter 13에서 대응)</a:t>
+              <a:t>•  E-Rows와 A-Rows 차이가 크면 카디널리티 추정 오류를 의심한다 (ch08에서 대응)</a:t>
             </a:r>
           </a:p>
         </p:txBody>
@@ -19075,7 +19075,7 @@
                 </a:solidFill>
                 <a:latin typeface="Malgun Gothic"/>
               </a:rPr>
-              <a:t>•  실습문제 10문항 — SQL튜닝_Ch03_문제.md</a:t>
+              <a:t>•  실습문제 10문항 — ch03_문제.md</a:t>
             </a:r>
           </a:p>
           <a:p>

--- a/DBTUNING/ch03_실행계획기초/ch03_교안.pptx
+++ b/DBTUNING/ch03_실행계획기초/ch03_교안.pptx
@@ -555,7 +555,7 @@
           <a:lstStyle/>
           <a:p>
             <a:r>
-              <a:t>제ch03은 이후 열한 개 챕터를 떠받치는 기초 공사다. 앞으로 어떤 기법을 배우든 개선 여부를 실행계획으로 증명해야 하는데, 계획을 읽지 못하면 그 증명 자체가 성립하지 않는다. 이 장에서는 인덱스를 하나도 만들지 않고 기존 PK 인덱스만으로 여섯 가지 오퍼레이션 패턴을 관찰한다. 실행계획 판독은 문법 학습과 달라서 규칙 몇 줄을 듣는 것만으로는 몸에 붙지 않으므로, 강의 내내 화면의 계획을 손가락으로 짚어 가며 소리 내어 읽히는 진행을 권한다. 첫 화면에서 이 장이 개선의 장이 아니라 판독의 장임을 분명히 선언하고 시작한다. 수업 첫머리에 실습 DB 접속과 DBMS_XPLAN 권한을 미리 점검해 두면 진행이 끊기지 않는다.</a:t>
+              <a:t>ch03은 이후 열한 개 챕터를 떠받치는 기초 공사다. 앞으로 어떤 기법을 배우든 개선 여부를 실행계획으로 증명해야 하는데, 계획을 읽지 못하면 그 증명 자체가 성립하지 않는다. 이 장에서는 인덱스를 하나도 만들지 않고 기존 PK 인덱스만으로 여섯 가지 오퍼레이션 패턴을 관찰한다. 실행계획 판독은 문법 학습과 달라서 규칙 몇 줄을 듣는 것만으로는 몸에 붙지 않으므로, 강의 내내 화면의 계획을 손가락으로 짚어 가며 소리 내어 읽히는 진행을 권한다. 첫 화면에서 이 장이 개선의 장이 아니라 판독의 장임을 분명히 선언하고 시작한다. 수업 첫머리에 실습 DB 접속과 DBMS_XPLAN 권한을 미리 점검해 두면 진행이 끊기지 않는다.</a:t>
             </a:r>
           </a:p>
         </p:txBody>
@@ -7352,7 +7352,7 @@
                 </a:solidFill>
                 <a:latin typeface="Malgun Gothic"/>
               </a:rPr>
-              <a:t>Oracle SQL 튜닝 과정  ·  제ch03</a:t>
+              <a:t>Oracle SQL 튜닝 과정  ·  ch03</a:t>
             </a:r>
           </a:p>
         </p:txBody>
